--- a/week-06/presentations/ppts/day-02-managing-engagement.pptx
+++ b/week-06/presentations/ppts/day-02-managing-engagement.pptx
@@ -1447,7 +1447,7 @@
             </a:pPr>
             <a:r>
               <a:rPr/>
-              <a:t>By 16:00, every triad has SEP §2. Friday’s negotiation simulations draw from the “5 most consequential.”</a:t>
+              <a:t>By 16:00, every triad has SEP Section 2. Friday’s negotiation simulations draw from the “5 most consequential.”</a:t>
             </a:r>
           </a:p>
         </p:txBody>
@@ -6261,7 +6261,7 @@
             </a:pPr>
             <a:r>
               <a:rPr/>
-              <a:t>🧿 AI Cross-Check</a:t>
+              <a:t>🤖 AI Cross-Check</a:t>
             </a:r>
           </a:p>
         </p:txBody>
@@ -6438,7 +6438,7 @@
             </a:pPr>
             <a:r>
               <a:rPr/>
-              <a:t>15 min: document in §2</a:t>
+              <a:t>15 min: document in Section 2</a:t>
             </a:r>
           </a:p>
           <a:p>
@@ -6582,7 +6582,7 @@
             </a:pPr>
             <a:r>
               <a:rPr/>
-              <a:t>SEP §2 drafted</a:t>
+              <a:t>SEP Section 2 drafted</a:t>
             </a:r>
           </a:p>
           <a:p>
@@ -6627,7 +6627,7 @@
             </a:pPr>
             <a:r>
               <a:rPr/>
-              <a:t>Bring to Day 3: SEP §§1–2 + your TCD §5 trade-offs. Tomorrow we translate one for an exec.</a:t>
+              <a:t>Bring to Day 3: SEP Sections 1–2 + your TCD Section 5 trade-offs. Tomorrow we translate one for an exec.</a:t>
             </a:r>
           </a:p>
         </p:txBody>
@@ -6927,7 +6927,7 @@
             </a:pPr>
             <a:r>
               <a:rPr/>
-              <a:t>Pin SEP §1 grid + RACI on the wall</a:t>
+              <a:t>Pin SEP Section 1 grid + RACI on the wall</a:t>
             </a:r>
           </a:p>
           <a:p>

--- a/week-06/presentations/ppts/day-02-managing-engagement.pptx
+++ b/week-06/presentations/ppts/day-02-managing-engagement.pptx
@@ -5722,7 +5722,7 @@
             </a:pPr>
             <a:r>
               <a:rPr/>
-              <a:t>Reciprocal asks: what will they ask of you? Predict; don’t be surprised.</a:t>
+              <a:t>Reciprocal asks: what will they ask of you? Predict; don’t be surprised — ask for an SLO (Service Level Objective) sign-off and expect a scope ask back.</a:t>
             </a:r>
           </a:p>
         </p:txBody>
@@ -6582,7 +6582,7 @@
             </a:pPr>
             <a:r>
               <a:rPr/>
-              <a:t>SEP Section 2 drafted</a:t>
+              <a:t>Stakeholder Engagement Plan (SEP) Section 2 drafted</a:t>
             </a:r>
           </a:p>
           <a:p>
@@ -6618,7 +6618,7 @@
             </a:pPr>
             <a:r>
               <a:rPr/>
-              <a:t>Translation layer: TCD/TMD trade-offs → business</a:t>
+              <a:t>Translation layer: Technical Concept Document (TCD)/Technical Modeling Document (TMD) trade-offs → business</a:t>
             </a:r>
           </a:p>
           <a:p>
@@ -6792,7 +6792,7 @@
             </a:pPr>
             <a:r>
               <a:rPr/>
-              <a:t>Build “right now” asks across decisions / information / action</a:t>
+              <a:t>Build “right now” asks across decisions / information / action — decision asks trace to a RACI matrix (Responsible, Accountable, Consulted, Informed)</a:t>
             </a:r>
           </a:p>
           <a:p>
@@ -7338,6 +7338,15 @@
         <p:txBody>
           <a:bodyPr/>
           <a:lstStyle/>
+          <a:p>
+            <a:pPr lvl="0" indent="0" marL="0">
+              <a:buNone/>
+            </a:pPr>
+            <a:r>
+              <a:rPr/>
+              <a:t>HP = High Power, HI = High Interest, LP = Low Power, LI = Low Interest (from the Power × Interest grid).</a:t>
+            </a:r>
+          </a:p>
           <a:p>
             <a:pPr lvl="0" indent="0" marL="0">
               <a:buNone/>

--- a/week-06/presentations/ppts/day-02-managing-engagement.pptx
+++ b/week-06/presentations/ppts/day-02-managing-engagement.pptx
@@ -5262,6 +5262,44 @@
           </a:p>
         </p:txBody>
       </p:sp>
+      <p:sp>
+        <p:nvSpPr>
+          <p:cNvPr id="3" name="Content Placeholder 2"/>
+          <p:cNvSpPr>
+            <a:spLocks noGrp="1"/>
+          </p:cNvSpPr>
+          <p:nvPr>
+            <p:ph idx="1"/>
+          </p:nvPr>
+        </p:nvSpPr>
+        <p:spPr/>
+        <p:txBody>
+          <a:bodyPr/>
+          <a:lstStyle/>
+          <a:p>
+            <a:pPr lvl="0" indent="0">
+              <a:buNone/>
+            </a:pPr>
+            <a:r>
+              <a:rPr>
+                <a:latin typeface="Courier"/>
+              </a:rPr>
+              <a:t>### &lt;Name / Role&gt;
+**Quadrant:** ...
+**Cadence:** weekly / bi-weekly / monthly / trigger
+**Format:** memo / email / sync / standup mention
+**Length:** &lt; N words / &lt; N min
+**What they need from us (recurring):** ...
+**What we need from them (recurring):** ...
+**What they need from us right now:** ...
+**What we need from them right now:** ...
+**Channel of choice:** email / Slack / sync / Confluence
+**Backup channel:** ...
+**Stakeholder-specific notes:** ...</a:t>
+            </a:r>
+          </a:p>
+        </p:txBody>
+      </p:sp>
     </p:spTree>
   </p:cSld>
 </p:sld>
@@ -6262,6 +6300,42 @@
             <a:r>
               <a:rPr/>
               <a:t>🤖 AI Cross-Check</a:t>
+            </a:r>
+          </a:p>
+        </p:txBody>
+      </p:sp>
+      <p:sp>
+        <p:nvSpPr>
+          <p:cNvPr id="3" name="Content Placeholder 2"/>
+          <p:cNvSpPr>
+            <a:spLocks noGrp="1"/>
+          </p:cNvSpPr>
+          <p:nvPr>
+            <p:ph idx="1"/>
+          </p:nvPr>
+        </p:nvSpPr>
+        <p:spPr/>
+        <p:txBody>
+          <a:bodyPr/>
+          <a:lstStyle/>
+          <a:p>
+            <a:pPr lvl="0" indent="0">
+              <a:buNone/>
+            </a:pPr>
+            <a:r>
+              <a:rPr>
+                <a:latin typeface="Courier"/>
+              </a:rPr>
+              <a:t>Role: Senior PM reviewing a junior TPM's engagement plan.
+Context: &lt;SEP Section 1 + Section 2 stakeholder list and engagement plans&gt;
+Task: Identify the top 3 engagement risks:
+1. A stakeholder likely under-served by the plan
+2. A stakeholder likely over-served (TPM wasting attention)
+3. A specific anti-pattern the plan is exposed to
+Constraints:
+- Be specific
+- Suggest a concrete adjustment
+Format: 3 findings — Risk / Why / Adjustment.</a:t>
             </a:r>
           </a:p>
         </p:txBody>

--- a/week-06/presentations/ppts/day-02-managing-engagement.pptx
+++ b/week-06/presentations/ppts/day-02-managing-engagement.pptx
@@ -873,7 +873,7 @@
             </a:pPr>
             <a:r>
               <a:rPr/>
-              <a:t>If a triad only lists their asks (not reciprocal), surface it.</a:t>
+              <a:t>If a quad only lists their asks (not reciprocal), surface it.</a:t>
             </a:r>
           </a:p>
         </p:txBody>
@@ -955,7 +955,7 @@
             </a:pPr>
             <a:r>
               <a:rPr/>
-              <a:t>The conflict-surfacing exercise is high-value. Triads who skip it ship surprise escalations.</a:t>
+              <a:t>The conflict-surfacing exercise is high-value. Quads who skip it ship surprise escalations.</a:t>
             </a:r>
           </a:p>
         </p:txBody>
@@ -1447,7 +1447,7 @@
             </a:pPr>
             <a:r>
               <a:rPr/>
-              <a:t>By 16:00, every triad has SEP Section 2. Friday’s negotiation simulations draw from the “5 most consequential.”</a:t>
+              <a:t>By 16:00, every quad has SEP Section 2. Friday’s negotiation simulations draw from the “5 most consequential.”</a:t>
             </a:r>
           </a:p>
         </p:txBody>
@@ -1939,7 +1939,7 @@
             </a:pPr>
             <a:r>
               <a:rPr/>
-              <a:t>If a triad treats this as gospel, they’ll over-mechanize. It’s a calibration tool.</a:t>
+              <a:t>If a quad treats this as gospel, they’ll over-mechanize. It’s a calibration tool.</a:t>
             </a:r>
           </a:p>
         </p:txBody>
@@ -5478,7 +5478,7 @@
             </a:pPr>
             <a:r>
               <a:rPr b="1"/>
-              <a:t>Triads • 40 minutes</a:t>
+              <a:t>Quads • 40 minutes</a:t>
             </a:r>
           </a:p>
           <a:p>
@@ -5943,7 +5943,7 @@
             </a:pPr>
             <a:r>
               <a:rPr b="1"/>
-              <a:t>Triads • 40 minutes</a:t>
+              <a:t>Quads • 40 minutes</a:t>
             </a:r>
           </a:p>
           <a:p>
@@ -6485,7 +6485,7 @@
             </a:pPr>
             <a:r>
               <a:rPr b="1"/>
-              <a:t>Triads • 45 minutes • Wrap</a:t>
+              <a:t>Quads • 45 minutes • Wrap</a:t>
             </a:r>
           </a:p>
           <a:p>
@@ -7682,7 +7682,7 @@
             </a:pPr>
             <a:r>
               <a:rPr b="1"/>
-              <a:t>Triads • 35 minutes</a:t>
+              <a:t>Quads • 35 minutes</a:t>
             </a:r>
           </a:p>
           <a:p>

--- a/week-06/presentations/ppts/day-02-managing-engagement.pptx
+++ b/week-06/presentations/ppts/day-02-managing-engagement.pptx
@@ -5478,7 +5478,7 @@
             </a:pPr>
             <a:r>
               <a:rPr b="1"/>
-              <a:t>Quads • 40 minutes</a:t>
+              <a:t>Quads • 50 minutes</a:t>
             </a:r>
           </a:p>
           <a:p>
@@ -5943,7 +5943,7 @@
             </a:pPr>
             <a:r>
               <a:rPr b="1"/>
-              <a:t>Quads • 40 minutes</a:t>
+              <a:t>Quads • 50 minutes</a:t>
             </a:r>
           </a:p>
           <a:p>
@@ -6485,7 +6485,7 @@
             </a:pPr>
             <a:r>
               <a:rPr b="1"/>
-              <a:t>Quads • 45 minutes • Wrap</a:t>
+              <a:t>Quads • 55 minutes • Wrap</a:t>
             </a:r>
           </a:p>
           <a:p>
@@ -7682,7 +7682,7 @@
             </a:pPr>
             <a:r>
               <a:rPr b="1"/>
-              <a:t>Quads • 35 minutes</a:t>
+              <a:t>Quads • 45 minutes</a:t>
             </a:r>
           </a:p>
           <a:p>

--- a/week-06/presentations/ppts/day-02-managing-engagement.pptx
+++ b/week-06/presentations/ppts/day-02-managing-engagement.pptx
@@ -5496,7 +5496,7 @@
             </a:pPr>
             <a:r>
               <a:rPr/>
-              <a:t>10 min: HP × HI detailed plans</a:t>
+              <a:t>20 min: HP × HI detailed plans</a:t>
             </a:r>
           </a:p>
           <a:p>
@@ -5541,7 +5541,7 @@
             </a:pPr>
             <a:r>
               <a:rPr/>
-              <a:t>⏱ 5 + 10 + 10 + 5 + 5 + 5</a:t>
+              <a:t>⏱ 5 + 20 + 10 + 5 + 5 + 5</a:t>
             </a:r>
           </a:p>
         </p:txBody>
@@ -5952,7 +5952,7 @@
             </a:pPr>
             <a:r>
               <a:rPr/>
-              <a:t>20 min: 3–5 asks per stakeholder (mix of categories)</a:t>
+              <a:t>30 min: 3–5 asks per stakeholder (mix of categories)</a:t>
             </a:r>
           </a:p>
           <a:p>
@@ -5988,7 +5988,7 @@
             </a:pPr>
             <a:r>
               <a:rPr/>
-              <a:t>⏱ 20 + 10 + 5 + 5</a:t>
+              <a:t>⏱ 30 + 10 + 5 + 5</a:t>
             </a:r>
           </a:p>
         </p:txBody>
@@ -6503,7 +6503,7 @@
             </a:pPr>
             <a:r>
               <a:rPr/>
-              <a:t>15 min: design counter-measures for top 2–3</a:t>
+              <a:t>25 min: design counter-measures for top 2–3</a:t>
             </a:r>
           </a:p>
           <a:p>
@@ -6530,7 +6530,7 @@
             </a:pPr>
             <a:r>
               <a:rPr/>
-              <a:t>⏱ 10 + 15 + 15 + 5 · 15-min wrap</a:t>
+              <a:t>⏱ 10 + 25 + 15 + 5 · 15-min wrap</a:t>
             </a:r>
           </a:p>
         </p:txBody>
@@ -7709,7 +7709,7 @@
             </a:pPr>
             <a:r>
               <a:rPr/>
-              <a:t>15 min: pick cadence + format + length</a:t>
+              <a:t>25 min: pick cadence + format + length</a:t>
             </a:r>
           </a:p>
           <a:p>
@@ -7727,7 +7727,7 @@
             </a:pPr>
             <a:r>
               <a:rPr/>
-              <a:t>⏱ 10 + 15 + 10</a:t>
+              <a:t>⏱ 10 + 25 + 10</a:t>
             </a:r>
           </a:p>
         </p:txBody>
